--- a/reviews/s3_resumen.pptx
+++ b/reviews/s3_resumen.pptx
@@ -109,6 +109,11 @@
       </a:defRPr>
     </a:lvl9pPr>
   </p:defaultTextStyle>
+  <p:extLst>
+    <p:ext uri="{EFAFB233-063F-42B5-8137-9DF3F51BA10A}">
+      <p15:sldGuideLst xmlns:p15="http://schemas.microsoft.com/office/powerpoint/2012/main"/>
+    </p:ext>
+  </p:extLst>
 </p:presentation>
 </file>
 
@@ -3500,159 +3505,159 @@
           </a:p>
           <a:p>
             <a:r>
-              <a:rPr lang="en-US" sz="1600" dirty="0"/>
+              <a:rPr lang="en-US" sz="1600" b="1" i="1" dirty="0"/>
               <a:t>La </a:t>
             </a:r>
             <a:r>
-              <a:rPr lang="en-US" sz="1600" dirty="0" err="1"/>
+              <a:rPr lang="en-US" sz="1600" b="1" i="1" dirty="0" err="1"/>
               <a:t>falta</a:t>
             </a:r>
             <a:r>
-              <a:rPr lang="en-US" sz="1600" dirty="0"/>
+              <a:rPr lang="en-US" sz="1600" b="1" i="1" dirty="0"/>
               <a:t> de </a:t>
             </a:r>
             <a:r>
-              <a:rPr lang="en-US" sz="1600" dirty="0" err="1"/>
+              <a:rPr lang="en-US" sz="1600" b="1" i="1" dirty="0" err="1"/>
               <a:t>visibilidad</a:t>
             </a:r>
             <a:r>
-              <a:rPr lang="en-US" sz="1600" dirty="0"/>
+              <a:rPr lang="en-US" sz="1600" b="1" i="1" dirty="0"/>
               <a:t> en la </a:t>
             </a:r>
             <a:r>
-              <a:rPr lang="en-US" sz="1600" dirty="0" err="1"/>
+              <a:rPr lang="en-US" sz="1600" b="1" i="1" dirty="0" err="1"/>
               <a:t>cadena</a:t>
             </a:r>
             <a:r>
-              <a:rPr lang="en-US" sz="1600" dirty="0"/>
+              <a:rPr lang="en-US" sz="1600" b="1" i="1" dirty="0"/>
               <a:t> de </a:t>
             </a:r>
             <a:r>
-              <a:rPr lang="en-US" sz="1600" dirty="0" err="1"/>
+              <a:rPr lang="en-US" sz="1600" b="1" i="1" dirty="0" err="1"/>
               <a:t>suministro</a:t>
             </a:r>
             <a:r>
-              <a:rPr lang="en-US" sz="1600" dirty="0"/>
+              <a:rPr lang="en-US" sz="1600" b="1" i="1" dirty="0"/>
               <a:t> de software y </a:t>
             </a:r>
             <a:r>
-              <a:rPr lang="en-US" sz="1600" dirty="0" err="1"/>
+              <a:rPr lang="en-US" sz="1600" b="1" i="1" dirty="0" err="1"/>
               <a:t>los</a:t>
             </a:r>
             <a:r>
-              <a:rPr lang="en-US" sz="1600" dirty="0"/>
-              <a:t> </a:t>
-            </a:r>
-            <a:r>
-              <a:rPr lang="en-US" sz="1600" dirty="0" err="1"/>
+              <a:rPr lang="en-US" sz="1600" b="1" i="1" dirty="0"/>
+              <a:t> </a:t>
+            </a:r>
+            <a:r>
+              <a:rPr lang="en-US" sz="1600" b="1" i="1" dirty="0" err="1"/>
               <a:t>riesgos</a:t>
             </a:r>
             <a:r>
-              <a:rPr lang="en-US" sz="1600" dirty="0"/>
-              <a:t> </a:t>
-            </a:r>
-            <a:r>
-              <a:rPr lang="en-US" sz="1600" dirty="0" err="1"/>
+              <a:rPr lang="en-US" sz="1600" b="1" i="1" dirty="0"/>
+              <a:t> </a:t>
+            </a:r>
+            <a:r>
+              <a:rPr lang="en-US" sz="1600" b="1" i="1" dirty="0" err="1"/>
               <a:t>asociados</a:t>
             </a:r>
             <a:r>
-              <a:rPr lang="en-US" sz="1600" dirty="0"/>
+              <a:rPr lang="en-US" sz="1600" b="1" i="1" dirty="0"/>
               <a:t> en </a:t>
             </a:r>
             <a:r>
-              <a:rPr lang="en-US" sz="1600" dirty="0" err="1"/>
+              <a:rPr lang="en-US" sz="1600" b="1" i="1" dirty="0" err="1"/>
               <a:t>seguridad</a:t>
             </a:r>
             <a:r>
-              <a:rPr lang="en-US" sz="1600" dirty="0"/>
+              <a:rPr lang="en-US" sz="1600" b="1" i="1" dirty="0"/>
               <a:t> y </a:t>
             </a:r>
             <a:r>
-              <a:rPr lang="en-US" sz="1600" dirty="0" err="1"/>
+              <a:rPr lang="en-US" sz="1600" b="1" i="1" dirty="0" err="1"/>
               <a:t>licencias</a:t>
             </a:r>
             <a:r>
-              <a:rPr lang="en-US" sz="1600" dirty="0"/>
-              <a:t> </a:t>
-            </a:r>
-            <a:r>
-              <a:rPr lang="en-US" sz="1600" dirty="0" err="1"/>
+              <a:rPr lang="en-US" sz="1600" b="1" i="1" dirty="0"/>
+              <a:t> </a:t>
+            </a:r>
+            <a:r>
+              <a:rPr lang="en-US" sz="1600" b="1" i="1" dirty="0" err="1"/>
               <a:t>debido</a:t>
             </a:r>
             <a:r>
-              <a:rPr lang="en-US" sz="1600" dirty="0"/>
+              <a:rPr lang="en-US" sz="1600" b="1" i="1" dirty="0"/>
               <a:t> a la </a:t>
             </a:r>
             <a:r>
-              <a:rPr lang="en-US" sz="1600" dirty="0" err="1"/>
+              <a:rPr lang="en-US" sz="1600" b="1" i="1" dirty="0" err="1"/>
               <a:t>integración</a:t>
             </a:r>
             <a:r>
-              <a:rPr lang="en-US" sz="1600" dirty="0"/>
+              <a:rPr lang="en-US" sz="1600" b="1" i="1" dirty="0"/>
               <a:t> de un gran </a:t>
             </a:r>
             <a:r>
-              <a:rPr lang="en-US" sz="1600" dirty="0" err="1"/>
+              <a:rPr lang="en-US" sz="1600" b="1" i="1" dirty="0" err="1"/>
               <a:t>número</a:t>
             </a:r>
             <a:r>
-              <a:rPr lang="en-US" sz="1600" dirty="0"/>
+              <a:rPr lang="en-US" sz="1600" b="1" i="1" dirty="0"/>
               <a:t> de </a:t>
             </a:r>
             <a:r>
-              <a:rPr lang="en-US" sz="1600" dirty="0" err="1"/>
+              <a:rPr lang="en-US" sz="1600" b="1" i="1" dirty="0" err="1"/>
               <a:t>componentes</a:t>
             </a:r>
             <a:r>
-              <a:rPr lang="en-US" sz="1600" dirty="0"/>
+              <a:rPr lang="en-US" sz="1600" b="1" i="1" dirty="0"/>
               <a:t> de software de </a:t>
             </a:r>
             <a:r>
-              <a:rPr lang="en-US" sz="1600" dirty="0" err="1"/>
+              <a:rPr lang="en-US" sz="1600" b="1" i="1" dirty="0" err="1"/>
               <a:t>código</a:t>
             </a:r>
             <a:r>
-              <a:rPr lang="en-US" sz="1600" dirty="0"/>
-              <a:t> </a:t>
-            </a:r>
-            <a:r>
-              <a:rPr lang="en-US" sz="1600" dirty="0" err="1"/>
+              <a:rPr lang="en-US" sz="1600" b="1" i="1" dirty="0"/>
+              <a:t> </a:t>
+            </a:r>
+            <a:r>
+              <a:rPr lang="en-US" sz="1600" b="1" i="1" dirty="0" err="1"/>
               <a:t>abierto</a:t>
             </a:r>
             <a:r>
-              <a:rPr lang="en-US" sz="1600" dirty="0"/>
+              <a:rPr lang="en-US" sz="1600" b="1" i="1" dirty="0"/>
               <a:t> y </a:t>
             </a:r>
             <a:r>
-              <a:rPr lang="en-US" sz="1600" dirty="0" err="1"/>
+              <a:rPr lang="en-US" sz="1600" b="1" i="1" dirty="0" err="1"/>
               <a:t>propietario</a:t>
             </a:r>
             <a:r>
-              <a:rPr lang="en-US" sz="1600" dirty="0"/>
+              <a:rPr lang="en-US" sz="1600" b="1" i="1" dirty="0"/>
               <a:t> en </a:t>
             </a:r>
             <a:r>
-              <a:rPr lang="en-US" sz="1600" dirty="0" err="1"/>
+              <a:rPr lang="en-US" sz="1600" b="1" i="1" dirty="0" err="1"/>
               <a:t>los</a:t>
             </a:r>
             <a:r>
-              <a:rPr lang="en-US" sz="1600" dirty="0"/>
-              <a:t> </a:t>
-            </a:r>
-            <a:r>
-              <a:rPr lang="en-US" sz="1600" dirty="0" err="1"/>
+              <a:rPr lang="en-US" sz="1600" b="1" i="1" dirty="0"/>
+              <a:t> </a:t>
+            </a:r>
+            <a:r>
+              <a:rPr lang="en-US" sz="1600" b="1" i="1" dirty="0" err="1"/>
               <a:t>productos</a:t>
             </a:r>
             <a:r>
-              <a:rPr lang="en-US" sz="1600" dirty="0"/>
+              <a:rPr lang="en-US" sz="1600" b="1" i="1" dirty="0"/>
               <a:t> de software </a:t>
             </a:r>
             <a:r>
-              <a:rPr lang="en-US" sz="1600" dirty="0" err="1"/>
+              <a:rPr lang="en-US" sz="1600" b="1" i="1" dirty="0" err="1"/>
               <a:t>moderno</a:t>
             </a:r>
             <a:r>
-              <a:rPr lang="en-US" sz="1600" dirty="0"/>
+              <a:rPr lang="en-US" sz="1600" b="1" i="1" dirty="0"/>
               <a:t>.</a:t>
             </a:r>
           </a:p>
@@ -3833,7 +3838,7 @@
           </a:p>
           <a:p>
             <a:r>
-              <a:rPr lang="en-GB" sz="1600" dirty="0">
+              <a:rPr lang="en-GB" sz="1600" b="1" i="1" dirty="0">
                 <a:solidFill>
                   <a:srgbClr val="000000"/>
                 </a:solidFill>
@@ -3843,7 +3848,7 @@
               <a:t>A </a:t>
             </a:r>
             <a:r>
-              <a:rPr lang="en-GB" sz="1600" dirty="0" err="1">
+              <a:rPr lang="en-GB" sz="1600" b="1" i="1" dirty="0" err="1">
                 <a:solidFill>
                   <a:srgbClr val="000000"/>
                 </a:solidFill>
@@ -3853,7 +3858,7 @@
               <a:t>diferencia</a:t>
             </a:r>
             <a:r>
-              <a:rPr lang="en-GB" sz="1600" dirty="0">
+              <a:rPr lang="en-GB" sz="1600" b="1" i="1" dirty="0">
                 <a:solidFill>
                   <a:srgbClr val="000000"/>
                 </a:solidFill>
@@ -3863,7 +3868,7 @@
               <a:t> de </a:t>
             </a:r>
             <a:r>
-              <a:rPr lang="en-GB" sz="1600" dirty="0" err="1">
+              <a:rPr lang="en-GB" sz="1600" b="1" i="1" dirty="0" err="1">
                 <a:solidFill>
                   <a:srgbClr val="000000"/>
                 </a:solidFill>
@@ -3873,7 +3878,7 @@
               <a:t>estudios</a:t>
             </a:r>
             <a:r>
-              <a:rPr lang="en-GB" sz="1600" dirty="0">
+              <a:rPr lang="en-GB" sz="1600" b="1" i="1" dirty="0">
                 <a:solidFill>
                   <a:srgbClr val="000000"/>
                 </a:solidFill>
@@ -3883,7 +3888,7 @@
               <a:t> </a:t>
             </a:r>
             <a:r>
-              <a:rPr lang="en-GB" sz="1600" dirty="0" err="1">
+              <a:rPr lang="en-GB" sz="1600" b="1" i="1" dirty="0" err="1">
                 <a:solidFill>
                   <a:srgbClr val="000000"/>
                 </a:solidFill>
@@ -3893,7 +3898,7 @@
               <a:t>previos</a:t>
             </a:r>
             <a:r>
-              <a:rPr lang="en-GB" sz="1600" dirty="0">
+              <a:rPr lang="en-GB" sz="1600" b="1" i="1" dirty="0">
                 <a:solidFill>
                   <a:srgbClr val="000000"/>
                 </a:solidFill>
@@ -3902,7 +3907,7 @@
               <a:t> </a:t>
             </a:r>
             <a:r>
-              <a:rPr lang="en-GB" sz="1600" dirty="0" err="1">
+              <a:rPr lang="en-GB" sz="1600" b="1" i="1" dirty="0" err="1">
                 <a:solidFill>
                   <a:srgbClr val="000000"/>
                 </a:solidFill>
@@ -3912,7 +3917,7 @@
               <a:t>cualitativos</a:t>
             </a:r>
             <a:r>
-              <a:rPr lang="en-GB" sz="1600" dirty="0">
+              <a:rPr lang="en-GB" sz="1600" b="1" i="1" dirty="0">
                 <a:solidFill>
                   <a:srgbClr val="000000"/>
                 </a:solidFill>
@@ -3922,7 +3927,7 @@
               <a:t>, </a:t>
             </a:r>
             <a:r>
-              <a:rPr lang="en-GB" sz="1600" dirty="0" err="1">
+              <a:rPr lang="en-GB" sz="1600" b="1" i="1" dirty="0" err="1">
                 <a:solidFill>
                   <a:srgbClr val="000000"/>
                 </a:solidFill>
@@ -3932,7 +3937,7 @@
               <a:t>este</a:t>
             </a:r>
             <a:r>
-              <a:rPr lang="en-GB" sz="1600" dirty="0">
+              <a:rPr lang="en-GB" sz="1600" b="1" i="1" dirty="0">
                 <a:solidFill>
                   <a:srgbClr val="000000"/>
                 </a:solidFill>
@@ -3942,7 +3947,7 @@
               <a:t> </a:t>
             </a:r>
             <a:r>
-              <a:rPr lang="en-GB" sz="1600" dirty="0" err="1">
+              <a:rPr lang="en-GB" sz="1600" b="1" i="1" dirty="0" err="1">
                 <a:solidFill>
                   <a:srgbClr val="000000"/>
                 </a:solidFill>
@@ -3952,7 +3957,7 @@
               <a:t>enfoque</a:t>
             </a:r>
             <a:r>
-              <a:rPr lang="en-GB" sz="1600" dirty="0">
+              <a:rPr lang="en-GB" sz="1600" b="1" i="1" dirty="0">
                 <a:solidFill>
                   <a:srgbClr val="000000"/>
                 </a:solidFill>
@@ -3962,7 +3967,7 @@
               <a:t> es </a:t>
             </a:r>
             <a:r>
-              <a:rPr lang="en-GB" sz="1600" dirty="0" err="1">
+              <a:rPr lang="en-GB" sz="1600" b="1" i="1" dirty="0" err="1">
                 <a:solidFill>
                   <a:srgbClr val="000000"/>
                 </a:solidFill>
@@ -3972,7 +3977,7 @@
               <a:t>totalmente</a:t>
             </a:r>
             <a:r>
-              <a:rPr lang="en-GB" sz="1600" dirty="0">
+              <a:rPr lang="en-GB" sz="1600" b="1" i="1" dirty="0">
                 <a:solidFill>
                   <a:srgbClr val="000000"/>
                 </a:solidFill>
@@ -3981,7 +3986,7 @@
               <a:t> </a:t>
             </a:r>
             <a:r>
-              <a:rPr lang="en-GB" sz="1600" dirty="0" err="1">
+              <a:rPr lang="en-GB" sz="1600" b="1" i="1" dirty="0" err="1">
                 <a:solidFill>
                   <a:srgbClr val="000000"/>
                 </a:solidFill>
@@ -3991,7 +3996,7 @@
               <a:t>automatizado</a:t>
             </a:r>
             <a:r>
-              <a:rPr lang="en-GB" sz="1600" dirty="0">
+              <a:rPr lang="en-GB" sz="1600" b="1" i="1" dirty="0">
                 <a:solidFill>
                   <a:srgbClr val="000000"/>
                 </a:solidFill>
@@ -4001,7 +4006,7 @@
               <a:t> y </a:t>
             </a:r>
             <a:r>
-              <a:rPr lang="en-GB" sz="1600" dirty="0" err="1">
+              <a:rPr lang="en-GB" sz="1600" b="1" i="1" dirty="0" err="1">
                 <a:solidFill>
                   <a:srgbClr val="000000"/>
                 </a:solidFill>
@@ -4011,7 +4016,7 @@
               <a:t>cuantitativo</a:t>
             </a:r>
             <a:r>
-              <a:rPr lang="en-GB" sz="1600" dirty="0">
+              <a:rPr lang="en-GB" sz="1600" b="1" i="1" dirty="0">
                 <a:solidFill>
                   <a:srgbClr val="000000"/>
                 </a:solidFill>
@@ -4476,119 +4481,119 @@
           </a:p>
           <a:p>
             <a:r>
-              <a:rPr lang="en-US" sz="1600" dirty="0"/>
+              <a:rPr lang="en-US" sz="1600" b="1" dirty="0"/>
               <a:t>La </a:t>
             </a:r>
             <a:r>
-              <a:rPr lang="en-US" sz="1600" dirty="0" err="1"/>
+              <a:rPr lang="en-US" sz="1600" b="1" dirty="0" err="1"/>
               <a:t>investigación</a:t>
             </a:r>
             <a:r>
-              <a:rPr lang="en-US" sz="1600" dirty="0"/>
-              <a:t> </a:t>
-            </a:r>
-            <a:r>
-              <a:rPr lang="en-US" sz="1600" dirty="0" err="1"/>
+              <a:rPr lang="en-US" sz="1600" b="1" dirty="0"/>
+              <a:t> </a:t>
+            </a:r>
+            <a:r>
+              <a:rPr lang="en-US" sz="1600" b="1" dirty="0" err="1"/>
               <a:t>tiene</a:t>
             </a:r>
             <a:r>
-              <a:rPr lang="en-US" sz="1600" dirty="0"/>
-              <a:t> </a:t>
-            </a:r>
-            <a:r>
-              <a:rPr lang="en-US" sz="1600" dirty="0" err="1"/>
+              <a:rPr lang="en-US" sz="1600" b="1" dirty="0"/>
+              <a:t> </a:t>
+            </a:r>
+            <a:r>
+              <a:rPr lang="en-US" sz="1600" b="1" dirty="0" err="1"/>
               <a:t>aplicaciones</a:t>
             </a:r>
             <a:r>
-              <a:rPr lang="en-US" sz="1600" dirty="0"/>
-              <a:t> </a:t>
-            </a:r>
-            <a:r>
-              <a:rPr lang="en-US" sz="1600" dirty="0" err="1"/>
+              <a:rPr lang="en-US" sz="1600" b="1" dirty="0"/>
+              <a:t> </a:t>
+            </a:r>
+            <a:r>
+              <a:rPr lang="en-US" sz="1600" b="1" dirty="0" err="1"/>
               <a:t>inmediatas</a:t>
             </a:r>
             <a:r>
-              <a:rPr lang="en-US" sz="1600" dirty="0"/>
+              <a:rPr lang="en-US" sz="1600" b="1" dirty="0"/>
               <a:t>, </a:t>
             </a:r>
             <a:r>
-              <a:rPr lang="en-US" sz="1600" dirty="0" err="1"/>
+              <a:rPr lang="en-US" sz="1600" b="1" dirty="0" err="1"/>
               <a:t>ya</a:t>
             </a:r>
             <a:r>
-              <a:rPr lang="en-US" sz="1600" dirty="0"/>
+              <a:rPr lang="en-US" sz="1600" b="1" dirty="0"/>
               <a:t> que </a:t>
             </a:r>
             <a:r>
-              <a:rPr lang="en-US" sz="1600" dirty="0" err="1"/>
+              <a:rPr lang="en-US" sz="1600" b="1" dirty="0" err="1"/>
               <a:t>herramientas</a:t>
             </a:r>
             <a:r>
-              <a:rPr lang="en-US" sz="1600" dirty="0"/>
+              <a:rPr lang="en-US" sz="1600" b="1" dirty="0"/>
               <a:t> de </a:t>
             </a:r>
             <a:r>
-              <a:rPr lang="en-US" sz="1600" dirty="0" err="1"/>
+              <a:rPr lang="en-US" sz="1600" b="1" dirty="0" err="1"/>
               <a:t>seguridad</a:t>
             </a:r>
             <a:r>
-              <a:rPr lang="en-US" sz="1600" dirty="0"/>
+              <a:rPr lang="en-US" sz="1600" b="1" dirty="0"/>
               <a:t> y </a:t>
             </a:r>
             <a:r>
-              <a:rPr lang="en-US" sz="1600" dirty="0" err="1"/>
+              <a:rPr lang="en-US" sz="1600" b="1" dirty="0" err="1"/>
               <a:t>mantenimiento</a:t>
             </a:r>
             <a:r>
-              <a:rPr lang="en-US" sz="1600" dirty="0"/>
-              <a:t> </a:t>
-            </a:r>
-            <a:r>
-              <a:rPr lang="en-US" sz="1600" dirty="0" err="1"/>
+              <a:rPr lang="en-US" sz="1600" b="1" dirty="0"/>
+              <a:t> </a:t>
+            </a:r>
+            <a:r>
+              <a:rPr lang="en-US" sz="1600" b="1" dirty="0" err="1"/>
               <a:t>dependen</a:t>
             </a:r>
             <a:r>
-              <a:rPr lang="en-US" sz="1600" dirty="0"/>
+              <a:rPr lang="en-US" sz="1600" b="1" dirty="0"/>
               <a:t> de </a:t>
             </a:r>
             <a:r>
-              <a:rPr lang="en-US" sz="1600" dirty="0" err="1"/>
+              <a:rPr lang="en-US" sz="1600" b="1" dirty="0" err="1"/>
               <a:t>estos</a:t>
             </a:r>
             <a:r>
-              <a:rPr lang="en-US" sz="1600" dirty="0"/>
-              <a:t> </a:t>
-            </a:r>
-            <a:r>
-              <a:rPr lang="en-US" sz="1600" dirty="0" err="1"/>
+              <a:rPr lang="en-US" sz="1600" b="1" dirty="0"/>
+              <a:t> </a:t>
+            </a:r>
+            <a:r>
+              <a:rPr lang="en-US" sz="1600" b="1" dirty="0" err="1"/>
               <a:t>gráficos</a:t>
             </a:r>
             <a:r>
-              <a:rPr lang="en-US" sz="1600" dirty="0"/>
+              <a:rPr lang="en-US" sz="1600" b="1" dirty="0"/>
               <a:t>. </a:t>
             </a:r>
             <a:r>
-              <a:rPr lang="en-US" sz="1600" dirty="0" err="1"/>
+              <a:rPr lang="en-US" sz="1600" b="1" dirty="0" err="1"/>
               <a:t>Detectar</a:t>
             </a:r>
             <a:r>
-              <a:rPr lang="en-US" sz="1600" dirty="0"/>
+              <a:rPr lang="en-US" sz="1600" b="1" dirty="0"/>
               <a:t> inexactitudes </a:t>
             </a:r>
             <a:r>
-              <a:rPr lang="en-US" sz="1600" dirty="0" err="1"/>
+              <a:rPr lang="en-US" sz="1600" b="1" dirty="0" err="1"/>
               <a:t>ayuda</a:t>
             </a:r>
             <a:r>
-              <a:rPr lang="en-US" sz="1600" dirty="0"/>
+              <a:rPr lang="en-US" sz="1600" b="1" dirty="0"/>
               <a:t> a </a:t>
             </a:r>
             <a:r>
-              <a:rPr lang="en-US" sz="1600" dirty="0" err="1"/>
+              <a:rPr lang="en-US" sz="1600" b="1" dirty="0" err="1"/>
               <a:t>mejorarlas</a:t>
             </a:r>
             <a:r>
-              <a:rPr lang="en-US" sz="1600" dirty="0"/>
+              <a:rPr lang="en-US" sz="1600" b="1" dirty="0"/>
               <a:t>.</a:t>
             </a:r>
           </a:p>
@@ -5136,59 +5141,59 @@
           </a:p>
           <a:p>
             <a:r>
-              <a:rPr lang="en-US" sz="1600" dirty="0" err="1"/>
+              <a:rPr lang="en-US" sz="1600" b="1" dirty="0" err="1"/>
               <a:t>Dependencia</a:t>
             </a:r>
             <a:r>
-              <a:rPr lang="en-US" sz="1600" dirty="0"/>
+              <a:rPr lang="en-US" sz="1600" b="1" dirty="0"/>
               <a:t> del web Scraping para </a:t>
             </a:r>
             <a:r>
-              <a:rPr lang="en-US" sz="1600" dirty="0" err="1"/>
+              <a:rPr lang="en-US" sz="1600" b="1" dirty="0" err="1"/>
               <a:t>recuperar</a:t>
             </a:r>
             <a:r>
-              <a:rPr lang="en-US" sz="1600" dirty="0"/>
+              <a:rPr lang="en-US" sz="1600" b="1" dirty="0"/>
               <a:t> la </a:t>
             </a:r>
             <a:r>
-              <a:rPr lang="en-US" sz="1600" dirty="0" err="1"/>
+              <a:rPr lang="en-US" sz="1600" b="1" dirty="0" err="1"/>
               <a:t>información</a:t>
             </a:r>
             <a:r>
-              <a:rPr lang="en-US" sz="1600" dirty="0"/>
+              <a:rPr lang="en-US" sz="1600" b="1" dirty="0"/>
               <a:t> del </a:t>
             </a:r>
             <a:r>
-              <a:rPr lang="en-US" sz="1600" dirty="0" err="1"/>
+              <a:rPr lang="en-US" sz="1600" b="1" dirty="0" err="1"/>
               <a:t>grafico</a:t>
             </a:r>
             <a:r>
-              <a:rPr lang="en-US" sz="1600" dirty="0"/>
+              <a:rPr lang="en-US" sz="1600" b="1" dirty="0"/>
               <a:t> de </a:t>
             </a:r>
             <a:r>
-              <a:rPr lang="en-US" sz="1600" dirty="0" err="1"/>
+              <a:rPr lang="en-US" sz="1600" b="1" dirty="0" err="1"/>
               <a:t>dependencias</a:t>
             </a:r>
             <a:r>
-              <a:rPr lang="en-US" sz="1600" dirty="0"/>
+              <a:rPr lang="en-US" sz="1600" b="1" dirty="0"/>
               <a:t> de </a:t>
             </a:r>
             <a:r>
-              <a:rPr lang="en-US" sz="1600" dirty="0" err="1"/>
+              <a:rPr lang="en-US" sz="1600" b="1" dirty="0" err="1"/>
               <a:t>los</a:t>
             </a:r>
             <a:r>
-              <a:rPr lang="en-US" sz="1600" dirty="0"/>
-              <a:t> </a:t>
-            </a:r>
-            <a:r>
-              <a:rPr lang="en-US" sz="1600" dirty="0" err="1"/>
+              <a:rPr lang="en-US" sz="1600" b="1" dirty="0"/>
+              <a:t> </a:t>
+            </a:r>
+            <a:r>
+              <a:rPr lang="en-US" sz="1600" b="1" dirty="0" err="1"/>
               <a:t>proyectos</a:t>
             </a:r>
             <a:r>
-              <a:rPr lang="en-US" sz="1600" dirty="0"/>
+              <a:rPr lang="en-US" sz="1600" b="1" dirty="0"/>
               <a:t>.</a:t>
             </a:r>
           </a:p>
@@ -5627,35 +5632,35 @@
           </a:p>
           <a:p>
             <a:r>
-              <a:rPr lang="en-US" sz="1600" dirty="0" err="1"/>
+              <a:rPr lang="en-US" sz="1600" b="1" dirty="0" err="1"/>
               <a:t>Contribuir</a:t>
             </a:r>
             <a:r>
-              <a:rPr lang="en-US" sz="1600" dirty="0"/>
+              <a:rPr lang="en-US" sz="1600" b="1" dirty="0"/>
               <a:t> a la </a:t>
             </a:r>
             <a:r>
-              <a:rPr lang="en-US" sz="1600" dirty="0" err="1"/>
+              <a:rPr lang="en-US" sz="1600" b="1" dirty="0" err="1"/>
               <a:t>mejora</a:t>
             </a:r>
             <a:r>
-              <a:rPr lang="en-US" sz="1600" dirty="0"/>
+              <a:rPr lang="en-US" sz="1600" b="1" dirty="0"/>
               <a:t> del </a:t>
             </a:r>
             <a:r>
-              <a:rPr lang="en-US" sz="1600" dirty="0" err="1"/>
+              <a:rPr lang="en-US" sz="1600" b="1" dirty="0" err="1"/>
               <a:t>grafico</a:t>
             </a:r>
             <a:r>
-              <a:rPr lang="en-US" sz="1600" dirty="0"/>
+              <a:rPr lang="en-US" sz="1600" b="1" dirty="0"/>
               <a:t> de </a:t>
             </a:r>
             <a:r>
-              <a:rPr lang="en-US" sz="1600" dirty="0" err="1"/>
+              <a:rPr lang="en-US" sz="1600" b="1" dirty="0" err="1"/>
               <a:t>dependencias</a:t>
             </a:r>
             <a:r>
-              <a:rPr lang="en-US" sz="1600" dirty="0"/>
+              <a:rPr lang="en-US" sz="1600" b="1" dirty="0"/>
               <a:t> de GitHub.</a:t>
             </a:r>
           </a:p>
